--- a/生成的课件/第1章  市场供求及其运行机制.pptx
+++ b/生成的课件/第1章  市场供求及其运行机制.pptx
@@ -4009,7 +4009,7 @@
                 <a:latin typeface="Times New Roman"/>
                 <a:ea typeface="宋体"/>
               </a:rPr>
-              <a:t>  1. 供给与供给规律的经济学界定</a:t>
+              <a:t>1. 供给与供给规律的经济学界定</a:t>
             </a:r>
           </a:p>
         </p:txBody>
@@ -4052,7 +4052,7 @@
                 <a:latin typeface="Times New Roman"/>
                 <a:ea typeface="宋体"/>
               </a:rPr>
-              <a:t>（1）供给的本质： </a:t>
+              <a:t>（1）供给的本质：</a:t>
             </a:r>
             <a:r>
               <a:rPr sz="1250" b="0">
@@ -4082,7 +4082,7 @@
                 <a:latin typeface="Times New Roman"/>
                 <a:ea typeface="宋体"/>
               </a:rPr>
-              <a:t>（2）有效供给两要素： </a:t>
+              <a:t>（2）有效供给两要素：</a:t>
             </a:r>
             <a:r>
               <a:rPr sz="1250" b="0">
@@ -4112,7 +4112,7 @@
                 <a:latin typeface="Times New Roman"/>
                 <a:ea typeface="宋体"/>
               </a:rPr>
-              <a:t>（3）供给规律（Law of Supply）： </a:t>
+              <a:t>（3）供给规律（Law of Supply）：</a:t>
             </a:r>
             <a:r>
               <a:rPr sz="1250" b="0">
@@ -4142,7 +4142,7 @@
                 <a:latin typeface="Times New Roman"/>
                 <a:ea typeface="宋体"/>
               </a:rPr>
-              <a:t>（4）供给曲线形态： </a:t>
+              <a:t>（4）供给曲线形态：</a:t>
             </a:r>
             <a:r>
               <a:rPr sz="1250" b="0">
@@ -4252,7 +4252,7 @@
                 <a:latin typeface="Times New Roman"/>
                 <a:ea typeface="宋体"/>
               </a:rPr>
-              <a:t>  2. 供给函数与反供给方程</a:t>
+              <a:t>2. 供给函数与反供给方程</a:t>
             </a:r>
           </a:p>
         </p:txBody>
@@ -4295,7 +4295,7 @@
                 <a:latin typeface="Times New Roman"/>
                 <a:ea typeface="宋体"/>
               </a:rPr>
-              <a:t>（1）广义供给函数： </a:t>
+              <a:t>（1）广义供给函数：</a:t>
             </a:r>
             <a:r>
               <a:rPr sz="1250" b="0">
@@ -4305,7 +4305,7 @@
                 <a:latin typeface="Times New Roman"/>
                 <a:ea typeface="宋体"/>
               </a:rPr>
-              <a:t>Q_s = f(P, P_i, Tech, P_r, E_p, N_f) \quad (P: 自身价格, P_i: 要素价格, Tech: 技术水平)</a:t>
+              <a:t>Qs = f(P, Pᵢ, Tech, Pᵣ, Ep, N_f) (P: 自身价格, Pᵢ: 要素价格, Tech: 技术水平)</a:t>
             </a:r>
           </a:p>
           <a:p>
@@ -4325,7 +4325,7 @@
                 <a:latin typeface="Times New Roman"/>
                 <a:ea typeface="宋体"/>
               </a:rPr>
-              <a:t>（2）线性供给方程： </a:t>
+              <a:t>（2）线性供给方程：</a:t>
             </a:r>
             <a:r>
               <a:rPr sz="1250" b="0">
@@ -4335,7 +4335,7 @@
                 <a:latin typeface="Times New Roman"/>
                 <a:ea typeface="宋体"/>
               </a:rPr>
-              <a:t>Q_s = -c + d P \quad (c, d &gt; 0)，其中 d 反映供给量对自身价格变动的响应灵敏度。</a:t>
+              <a:t>Qs = -c + d·P (c, d &gt; 0)，其中 d 反映供给量对自身价格变动的响应灵敏度。</a:t>
             </a:r>
           </a:p>
           <a:p>
@@ -4355,7 +4355,7 @@
                 <a:latin typeface="Times New Roman"/>
                 <a:ea typeface="宋体"/>
               </a:rPr>
-              <a:t>（3）反供给函数形式： </a:t>
+              <a:t>（3）反供给函数形式：</a:t>
             </a:r>
             <a:r>
               <a:rPr sz="1250" b="0">
@@ -4365,7 +4365,7 @@
                 <a:latin typeface="Times New Roman"/>
                 <a:ea typeface="宋体"/>
               </a:rPr>
-              <a:t>P = e + f Q_s \quad (斜率为正，截距 e 反映最低开工启动价格)。</a:t>
+              <a:t>P = e + f·Qs (斜率为正，截距 e 反映最低开工启动价格)。</a:t>
             </a:r>
           </a:p>
         </p:txBody>
@@ -4422,7 +4422,7 @@
                 <a:latin typeface="Times New Roman"/>
                 <a:ea typeface="宋体"/>
               </a:rPr>
-              <a:t>  ★ 核心要点：供给曲线向右上方倾斜是微观企业利润最大化动机在边际成本递增环境下的必然几何表现。</a:t>
+              <a:t>★ 核心要点：供给曲线向右上方倾斜是微观企业利润最大化动机在边际成本递增环境下的必然几何表现。</a:t>
             </a:r>
           </a:p>
         </p:txBody>
@@ -4829,7 +4829,7 @@
                 <a:latin typeface="Times New Roman"/>
                 <a:ea typeface="宋体"/>
               </a:rPr>
-              <a:t>  1. 自身价格与要素成本</a:t>
+              <a:t>1. 自身价格与要素成本</a:t>
             </a:r>
           </a:p>
         </p:txBody>
@@ -4872,7 +4872,7 @@
                 <a:latin typeface="Times New Roman"/>
                 <a:ea typeface="宋体"/>
               </a:rPr>
-              <a:t>（1）商品自身价格 (P)： </a:t>
+              <a:t>（1）商品自身价格 (P)：</a:t>
             </a:r>
             <a:r>
               <a:rPr sz="1200" b="0">
@@ -4902,7 +4902,7 @@
                 <a:latin typeface="Times New Roman"/>
                 <a:ea typeface="宋体"/>
               </a:rPr>
-              <a:t>（2）生产投入要素价格 (P_input)： </a:t>
+              <a:t>（2）生产投入要素价格 (Pᵢnput)：</a:t>
             </a:r>
             <a:r>
               <a:rPr sz="1200" b="0">
@@ -5012,7 +5012,7 @@
                 <a:latin typeface="Times New Roman"/>
                 <a:ea typeface="宋体"/>
               </a:rPr>
-              <a:t>  2. 技术革新与相关品价格</a:t>
+              <a:t>2. 技术革新与相关品价格</a:t>
             </a:r>
           </a:p>
         </p:txBody>
@@ -5055,7 +5055,7 @@
                 <a:latin typeface="Times New Roman"/>
                 <a:ea typeface="宋体"/>
               </a:rPr>
-              <a:t>（3）生产技术与管理水平 (Tech)： </a:t>
+              <a:t>（3）生产技术与管理水平 (Tech)：</a:t>
             </a:r>
             <a:r>
               <a:rPr sz="1200" b="0">
@@ -5085,7 +5085,7 @@
                 <a:latin typeface="Times New Roman"/>
                 <a:ea typeface="宋体"/>
               </a:rPr>
-              <a:t>（4）相关产品价格 (P_related)： </a:t>
+              <a:t>（4）相关产品价格 (P_related)：</a:t>
             </a:r>
             <a:r>
               <a:rPr sz="1200" b="0">
@@ -5195,7 +5195,7 @@
                 <a:latin typeface="Times New Roman"/>
                 <a:ea typeface="宋体"/>
               </a:rPr>
-              <a:t>  3. 未来预期与厂商数量</a:t>
+              <a:t>3. 未来预期与厂商数量</a:t>
             </a:r>
           </a:p>
         </p:txBody>
@@ -5238,7 +5238,7 @@
                 <a:latin typeface="Times New Roman"/>
                 <a:ea typeface="宋体"/>
               </a:rPr>
-              <a:t>（5）生产者对未来预期 (E_p)： </a:t>
+              <a:t>（5）生产者对未来预期 (Ep)：</a:t>
             </a:r>
             <a:r>
               <a:rPr sz="1200" b="0">
@@ -5268,7 +5268,7 @@
                 <a:latin typeface="Times New Roman"/>
                 <a:ea typeface="宋体"/>
               </a:rPr>
-              <a:t>（6）行业内生产者数量 (N_firm)： </a:t>
+              <a:t>（6）行业内生产者数量 (N_firm)：</a:t>
             </a:r>
             <a:r>
               <a:rPr sz="1200" b="0">
@@ -5335,7 +5335,7 @@
                 <a:latin typeface="Times New Roman"/>
                 <a:ea typeface="宋体"/>
               </a:rPr>
-              <a:t>  ★ 核心要点：技术进步是推动现代工业品供给曲线持续向右下方平移、降低全社会消费成本的最核心驱动力。</a:t>
+              <a:t>★ 核心要点：技术进步是推动现代工业品供给曲线持续向右下方平移、降低全社会消费成本的最核心驱动力。</a:t>
             </a:r>
           </a:p>
         </p:txBody>
@@ -5742,7 +5742,7 @@
                 <a:latin typeface="Times New Roman"/>
                 <a:ea typeface="宋体"/>
               </a:rPr>
-              <a:t>  1. 供给量的变动（Change in Quantity Supplied）</a:t>
+              <a:t>1. 供给量的变动（Change in Quantity Supplied）</a:t>
             </a:r>
           </a:p>
         </p:txBody>
@@ -5785,7 +5785,7 @@
                 <a:latin typeface="Times New Roman"/>
                 <a:ea typeface="宋体"/>
               </a:rPr>
-              <a:t>（1）驱动因素： </a:t>
+              <a:t>（1）驱动因素：</a:t>
             </a:r>
             <a:r>
               <a:rPr sz="1250" b="0">
@@ -5815,7 +5815,7 @@
                 <a:latin typeface="Times New Roman"/>
                 <a:ea typeface="宋体"/>
               </a:rPr>
-              <a:t>（2）图形特征： </a:t>
+              <a:t>（2）图形特征：</a:t>
             </a:r>
             <a:r>
               <a:rPr sz="1250" b="0">
@@ -5845,7 +5845,7 @@
                 <a:latin typeface="Times New Roman"/>
                 <a:ea typeface="宋体"/>
               </a:rPr>
-              <a:t>（3）经济逻辑： </a:t>
+              <a:t>（3）经济逻辑：</a:t>
             </a:r>
             <a:r>
               <a:rPr sz="1250" b="0">
@@ -5955,7 +5955,7 @@
                 <a:latin typeface="Times New Roman"/>
                 <a:ea typeface="宋体"/>
               </a:rPr>
-              <a:t>  2. 供给的变动（Change in Supply）</a:t>
+              <a:t>2. 供给的变动（Change in Supply）</a:t>
             </a:r>
           </a:p>
         </p:txBody>
@@ -5998,7 +5998,7 @@
                 <a:latin typeface="Times New Roman"/>
                 <a:ea typeface="宋体"/>
               </a:rPr>
-              <a:t>（1）驱动因素： </a:t>
+              <a:t>（1）驱动因素：</a:t>
             </a:r>
             <a:r>
               <a:rPr sz="1250" b="0">
@@ -6028,7 +6028,7 @@
                 <a:latin typeface="Times New Roman"/>
                 <a:ea typeface="宋体"/>
               </a:rPr>
-              <a:t>（2）图形特征： </a:t>
+              <a:t>（2）图形特征：</a:t>
             </a:r>
             <a:r>
               <a:rPr sz="1250" b="0">
@@ -6038,7 +6038,7 @@
                 <a:latin typeface="Times New Roman"/>
                 <a:ea typeface="宋体"/>
               </a:rPr>
-              <a:t>整条供给曲线整体向右平移（供给增加 S_1 \to S_2）或向左平移（S_1 \to S_3）。</a:t>
+              <a:t>整条供给曲线整体向右平移（供给增加 S₁ → S₂）或向左平移（S₁ → S₃）。</a:t>
             </a:r>
           </a:p>
           <a:p>
@@ -6058,7 +6058,7 @@
                 <a:latin typeface="Times New Roman"/>
                 <a:ea typeface="宋体"/>
               </a:rPr>
-              <a:t>（3）典型实证： </a:t>
+              <a:t>（3）典型实证：</a:t>
             </a:r>
             <a:r>
               <a:rPr sz="1250" b="0">
@@ -6125,7 +6125,7 @@
                 <a:latin typeface="Times New Roman"/>
                 <a:ea typeface="宋体"/>
               </a:rPr>
-              <a:t>  ★ 核心要点：准确把握供给曲线的平移驱动机制，是制造业企业规划长期产能与供应链战略的基本前提。</a:t>
+              <a:t>★ 核心要点：准确把握供给曲线的平移驱动机制，是制造业企业规划长期产能与供应链战略的基本前提。</a:t>
             </a:r>
           </a:p>
         </p:txBody>
@@ -6863,7 +6863,7 @@
                 <a:latin typeface="Times New Roman"/>
                 <a:ea typeface="宋体"/>
               </a:rPr>
-              <a:t>  供求四定理数理判定</a:t>
+              <a:t>供求四定理数理判定</a:t>
             </a:r>
           </a:p>
         </p:txBody>
@@ -6906,7 +6906,7 @@
                 <a:latin typeface="Times New Roman"/>
                 <a:ea typeface="宋体"/>
               </a:rPr>
-              <a:t>（1）均衡点 E (P*, Q*)： </a:t>
+              <a:t>（1）均衡点 E (P*, Q*)：</a:t>
             </a:r>
             <a:r>
               <a:rPr sz="1200" b="0">
@@ -6936,7 +6936,7 @@
                 <a:latin typeface="Times New Roman"/>
                 <a:ea typeface="宋体"/>
               </a:rPr>
-              <a:t>（2）定理一（需求增加）： </a:t>
+              <a:t>（2）定理一（需求增加）：</a:t>
             </a:r>
             <a:r>
               <a:rPr sz="1200" b="0">
@@ -6946,7 +6946,7 @@
                 <a:latin typeface="Times New Roman"/>
                 <a:ea typeface="宋体"/>
               </a:rPr>
-              <a:t>D 右移 \implies 均衡价格 P^* 上涨 \uparrow，均衡交易量 Q^* 增加 \uparrow。</a:t>
+              <a:t>D 右移 ⇒ 均衡价格 P* 上涨 uparrow，均衡交易量 Q* 增加 uparrow。</a:t>
             </a:r>
           </a:p>
           <a:p>
@@ -6966,7 +6966,7 @@
                 <a:latin typeface="Times New Roman"/>
                 <a:ea typeface="宋体"/>
               </a:rPr>
-              <a:t>（3）定理二（需求减少）： </a:t>
+              <a:t>（3）定理二（需求减少）：</a:t>
             </a:r>
             <a:r>
               <a:rPr sz="1200" b="0">
@@ -6976,7 +6976,7 @@
                 <a:latin typeface="Times New Roman"/>
                 <a:ea typeface="宋体"/>
               </a:rPr>
-              <a:t>D 左移 \implies 均衡价格 P^* 下跌 \downarrow，均衡交易量 Q^* 减少 \downarrow。</a:t>
+              <a:t>D 左移 ⇒ 均衡价格 P* 下跌 downarrow，均衡交易量 Q* 减少 downarrow。</a:t>
             </a:r>
           </a:p>
           <a:p>
@@ -6996,7 +6996,7 @@
                 <a:latin typeface="Times New Roman"/>
                 <a:ea typeface="宋体"/>
               </a:rPr>
-              <a:t>（4）定理三（供给增加）： </a:t>
+              <a:t>（4）定理三（供给增加）：</a:t>
             </a:r>
             <a:r>
               <a:rPr sz="1200" b="0">
@@ -7006,7 +7006,7 @@
                 <a:latin typeface="Times New Roman"/>
                 <a:ea typeface="宋体"/>
               </a:rPr>
-              <a:t>S 右移 \implies 均衡价格 P^* 下跌 \downarrow，均衡交易量 Q^* 增加 \uparrow。</a:t>
+              <a:t>S 右移 ⇒ 均衡价格 P* 下跌 downarrow，均衡交易量 Q* 增加 uparrow。</a:t>
             </a:r>
           </a:p>
           <a:p>
@@ -7026,7 +7026,7 @@
                 <a:latin typeface="Times New Roman"/>
                 <a:ea typeface="宋体"/>
               </a:rPr>
-              <a:t>（5）定理四（供给减少）： </a:t>
+              <a:t>（5）定理四（供给减少）：</a:t>
             </a:r>
             <a:r>
               <a:rPr sz="1200" b="0">
@@ -7036,7 +7036,7 @@
                 <a:latin typeface="Times New Roman"/>
                 <a:ea typeface="宋体"/>
               </a:rPr>
-              <a:t>S 左移 \implies 均衡价格 P^* 上涨 \uparrow，均衡交易量 Q^* 减少 \downarrow。</a:t>
+              <a:t>S 左移 ⇒ 均衡价格 P* 上涨 uparrow，均衡交易量 Q* 减少 downarrow。</a:t>
             </a:r>
           </a:p>
         </p:txBody>
@@ -7093,7 +7093,7 @@
                 <a:latin typeface="Times New Roman"/>
                 <a:ea typeface="宋体"/>
               </a:rPr>
-              <a:t>  ★ 理论精要：亚当·斯密'看不见的手'通过价格的自发上下波动，引导市场自发消除过剩或短缺，回归最优均衡。</a:t>
+              <a:t>★ 理论精要：亚当·斯密'看不见的手'通过价格的自发上下波动，引导市场自发消除过剩或短缺，回归最优均衡。</a:t>
             </a:r>
           </a:p>
         </p:txBody>
@@ -7500,7 +7500,7 @@
                 <a:latin typeface="Times New Roman"/>
                 <a:ea typeface="宋体"/>
               </a:rPr>
-              <a:t>  1. 供求方程联立求解实操</a:t>
+              <a:t>1. 供求方程联立求解实操</a:t>
             </a:r>
           </a:p>
         </p:txBody>
@@ -7543,7 +7543,7 @@
                 <a:latin typeface="Times New Roman"/>
                 <a:ea typeface="宋体"/>
               </a:rPr>
-              <a:t>（1）已知方程组： </a:t>
+              <a:t>（1）已知方程组：</a:t>
             </a:r>
             <a:r>
               <a:rPr sz="1250" b="0">
@@ -7553,7 +7553,7 @@
                 <a:latin typeface="Times New Roman"/>
                 <a:ea typeface="宋体"/>
               </a:rPr>
-              <a:t>需求方程 Q_d = 800 - 100P，供给方程 Q_s = -400 + 200P。</a:t>
+              <a:t>需求方程 Qd = 800 - 100P，供给方程 Qs = -400 + 200P。</a:t>
             </a:r>
           </a:p>
           <a:p>
@@ -7573,7 +7573,7 @@
                 <a:latin typeface="Times New Roman"/>
                 <a:ea typeface="宋体"/>
               </a:rPr>
-              <a:t>（2）市场出清条件： </a:t>
+              <a:t>（2）市场出清条件：</a:t>
             </a:r>
             <a:r>
               <a:rPr sz="1250" b="0">
@@ -7583,7 +7583,7 @@
                 <a:latin typeface="Times New Roman"/>
                 <a:ea typeface="宋体"/>
               </a:rPr>
-              <a:t>令 Q_d = Q_s \implies 800 - 100P = -400 + 200P \implies 300P = 1200。</a:t>
+              <a:t>令 Qd = Qs ⇒ 800 - 100P = -400 + 200P ⇒ 300P = 1200。</a:t>
             </a:r>
           </a:p>
           <a:p>
@@ -7603,7 +7603,7 @@
                 <a:latin typeface="Times New Roman"/>
                 <a:ea typeface="宋体"/>
               </a:rPr>
-              <a:t>（3）均衡解： </a:t>
+              <a:t>（3）均衡解：</a:t>
             </a:r>
             <a:r>
               <a:rPr sz="1250" b="0">
@@ -7613,7 +7613,7 @@
                 <a:latin typeface="Times New Roman"/>
                 <a:ea typeface="宋体"/>
               </a:rPr>
-              <a:t>均衡价格 P^* = 4.00 元/件，代入求得均衡交易量 Q^* = 800 - 100(4) = 400 单位。</a:t>
+              <a:t>均衡价格 P* = 4.00 元/件，代入求得均衡交易量 Q* = 800 - 100(4) = 400 单位。</a:t>
             </a:r>
           </a:p>
           <a:p>
@@ -7633,7 +7633,7 @@
                 <a:latin typeface="Times New Roman"/>
                 <a:ea typeface="宋体"/>
               </a:rPr>
-              <a:t>（4）失衡调节验证： </a:t>
+              <a:t>（4）失衡调节验证：</a:t>
             </a:r>
             <a:r>
               <a:rPr sz="1250" b="0">
@@ -7643,7 +7643,7 @@
                 <a:latin typeface="Times New Roman"/>
                 <a:ea typeface="宋体"/>
               </a:rPr>
-              <a:t>若现行市价 P=5元 \implies Q_d=300, Q_s=600 \implies 市场过剩 300 单位，厂商竞争降价促使价格回落至 4元。</a:t>
+              <a:t>若现行市价 P=5元 ⇒ Qd=300, Qs=600 ⇒ 市场过剩 300 单位，厂商竞争降价促使价格回落至 4元。</a:t>
             </a:r>
           </a:p>
         </p:txBody>
@@ -7743,7 +7743,7 @@
                 <a:latin typeface="Times New Roman"/>
                 <a:ea typeface="宋体"/>
               </a:rPr>
-              <a:t>  2. 瓦尔拉斯与马歇尔稳定性机制</a:t>
+              <a:t>2. 瓦尔拉斯与马歇尔稳定性机制</a:t>
             </a:r>
           </a:p>
         </p:txBody>
@@ -7786,7 +7786,7 @@
                 <a:latin typeface="Times New Roman"/>
                 <a:ea typeface="宋体"/>
               </a:rPr>
-              <a:t>（1）瓦尔拉斯价格调整机制： </a:t>
+              <a:t>（1）瓦尔拉斯价格调整机制：</a:t>
             </a:r>
             <a:r>
               <a:rPr sz="1250" b="0">
@@ -7816,7 +7816,7 @@
                 <a:latin typeface="Times New Roman"/>
                 <a:ea typeface="宋体"/>
               </a:rPr>
-              <a:t>（2）马歇尔数量调整机制： </a:t>
+              <a:t>（2）马歇尔数量调整机制：</a:t>
             </a:r>
             <a:r>
               <a:rPr sz="1250" b="0">
@@ -7883,7 +7883,7 @@
                 <a:latin typeface="Times New Roman"/>
                 <a:ea typeface="宋体"/>
               </a:rPr>
-              <a:t>  ★ 核心要点：代数方程联立求解将定性供求逻辑转化为精确可测的量化决策结果。</a:t>
+              <a:t>★ 核心要点：代数方程联立求解将定性供求逻辑转化为精确可测的量化决策结果。</a:t>
             </a:r>
           </a:p>
         </p:txBody>
@@ -8314,7 +8314,7 @@
                 <a:latin typeface="Times New Roman"/>
                 <a:ea typeface="宋体"/>
               </a:rPr>
-              <a:t>  从量税税负转嫁与弹性分摊法则</a:t>
+              <a:t>从量税税负转嫁与弹性分摊法则</a:t>
             </a:r>
           </a:p>
         </p:txBody>
@@ -8357,7 +8357,7 @@
                 <a:latin typeface="Times New Roman"/>
                 <a:ea typeface="宋体"/>
               </a:rPr>
-              <a:t>（1）法定纳税人 vs 实际负税人： </a:t>
+              <a:t>（1）法定纳税人 vs 实际负税人：</a:t>
             </a:r>
             <a:r>
               <a:rPr sz="1200" b="0">
@@ -8367,7 +8367,7 @@
                 <a:latin typeface="Times New Roman"/>
                 <a:ea typeface="宋体"/>
               </a:rPr>
-              <a:t>政府向生产者征收从量税 t，导致供给曲线向上平移 t 个单位（S \to S_t）。</a:t>
+              <a:t>政府向生产者征收从量税 t，导致供给曲线向上平移 t 个单位（S → Sₜ）。</a:t>
             </a:r>
           </a:p>
           <a:p>
@@ -8387,7 +8387,7 @@
                 <a:latin typeface="Times New Roman"/>
                 <a:ea typeface="宋体"/>
               </a:rPr>
-              <a:t>（2）消费者支付价与生产者实得价： </a:t>
+              <a:t>（2）消费者支付价与生产者实得价：</a:t>
             </a:r>
             <a:r>
               <a:rPr sz="1200" b="0">
@@ -8417,7 +8417,7 @@
                 <a:latin typeface="Times New Roman"/>
                 <a:ea typeface="宋体"/>
               </a:rPr>
-              <a:t>（3）税负转嫁分摊定理： </a:t>
+              <a:t>（3）税负转嫁分摊定理：</a:t>
             </a:r>
             <a:r>
               <a:rPr sz="1200" b="0">
@@ -8427,7 +8427,7 @@
                 <a:latin typeface="Times New Roman"/>
                 <a:ea typeface="宋体"/>
               </a:rPr>
-              <a:t>消费者税负 / 生产者税负 = E_s / |E_p|（税负主要由需求弹性较小的一方承担！）。</a:t>
+              <a:t>消费者税负 / 生产者税负 = E_s / |Ep|（税负主要由需求弹性较小的一方承担！）。</a:t>
             </a:r>
           </a:p>
           <a:p>
@@ -8447,7 +8447,7 @@
                 <a:latin typeface="Times New Roman"/>
                 <a:ea typeface="宋体"/>
               </a:rPr>
-              <a:t>（4）社会无谓损失（Deadweight Loss）： </a:t>
+              <a:t>（4）社会无谓损失（Deadweight Loss）：</a:t>
             </a:r>
             <a:r>
               <a:rPr sz="1200" b="0">
@@ -8457,7 +8457,7 @@
                 <a:latin typeface="Times New Roman"/>
                 <a:ea typeface="宋体"/>
               </a:rPr>
-              <a:t>三角形 DWL 区域代表由于交易量被税收扭曲萎缩（Q_t &lt; Q_0）所损失的社会纯福利！</a:t>
+              <a:t>三角形 DWL 区域代表由于交易量被税收扭曲萎缩（Qₜ &lt; Q₀）所损失的社会纯福利！</a:t>
             </a:r>
           </a:p>
         </p:txBody>
@@ -8514,7 +8514,7 @@
                 <a:latin typeface="Times New Roman"/>
                 <a:ea typeface="宋体"/>
               </a:rPr>
-              <a:t>  ★ 理论精要：税负转嫁不受政府立法指定影响，而是完全取决于买卖双方在市场上的相对价格弹性力量对比。</a:t>
+              <a:t>★ 理论精要：税负转嫁不受政府立法指定影响，而是完全取决于买卖双方在市场上的相对价格弹性力量对比。</a:t>
             </a:r>
           </a:p>
         </p:txBody>
@@ -8921,7 +8921,7 @@
                 <a:latin typeface="Times New Roman"/>
                 <a:ea typeface="宋体"/>
               </a:rPr>
-              <a:t>  1. 最高限价（Price Ceiling）政策机制</a:t>
+              <a:t>1. 最高限价（Price Ceiling）政策机制</a:t>
             </a:r>
           </a:p>
         </p:txBody>
@@ -8964,7 +8964,7 @@
                 <a:latin typeface="Times New Roman"/>
                 <a:ea typeface="宋体"/>
               </a:rPr>
-              <a:t>（1）政策出台目的： </a:t>
+              <a:t>（1）政策出台目的：</a:t>
             </a:r>
             <a:r>
               <a:rPr sz="1250" b="0">
@@ -8994,7 +8994,7 @@
                 <a:latin typeface="Times New Roman"/>
                 <a:ea typeface="宋体"/>
               </a:rPr>
-              <a:t>（2）实施生效前提： </a:t>
+              <a:t>（2）实施生效前提：</a:t>
             </a:r>
             <a:r>
               <a:rPr sz="1250" b="0">
@@ -9004,7 +9004,7 @@
                 <a:latin typeface="Times New Roman"/>
                 <a:ea typeface="宋体"/>
               </a:rPr>
-              <a:t>法定最高限价 P_c 必须严格低于自由市场出清均衡价 P^*，否则限价形同虚设。</a:t>
+              <a:t>法定最高限价 P_c 必须严格低于自由市场出清均衡价 P*，否则限价形同虚设。</a:t>
             </a:r>
           </a:p>
           <a:p>
@@ -9024,7 +9024,7 @@
                 <a:latin typeface="Times New Roman"/>
                 <a:ea typeface="宋体"/>
               </a:rPr>
-              <a:t>（3）直接供求缺口： </a:t>
+              <a:t>（3）直接供求缺口：</a:t>
             </a:r>
             <a:r>
               <a:rPr sz="1250" b="0">
@@ -9034,7 +9034,7 @@
                 <a:latin typeface="Times New Roman"/>
                 <a:ea typeface="宋体"/>
               </a:rPr>
-              <a:t>低价抑制生产供给意愿（Q_s 萎缩），同时刺激消费需求膨胀（Q_d 爆发），造成持久供不应求。</a:t>
+              <a:t>低价抑制生产供给意愿（Qs 萎缩），同时刺激消费需求膨胀（Qd 爆发），造成持久供不应求。</a:t>
             </a:r>
           </a:p>
         </p:txBody>
@@ -9134,7 +9134,7 @@
                 <a:latin typeface="Times New Roman"/>
                 <a:ea typeface="宋体"/>
               </a:rPr>
-              <a:t>  2. 最高限价引致的五大衍生严重弊端</a:t>
+              <a:t>2. 最高限价引致的五大衍生严重弊端</a:t>
             </a:r>
           </a:p>
         </p:txBody>
@@ -9177,7 +9177,7 @@
                 <a:latin typeface="Times New Roman"/>
                 <a:ea typeface="宋体"/>
               </a:rPr>
-              <a:t>（1）排队与配额配给制： </a:t>
+              <a:t>（1）排队与配额配给制：</a:t>
             </a:r>
             <a:r>
               <a:rPr sz="1150" b="0">
@@ -9207,7 +9207,7 @@
                 <a:latin typeface="Times New Roman"/>
                 <a:ea typeface="宋体"/>
               </a:rPr>
-              <a:t>（2）黑市地下交易滋生： </a:t>
+              <a:t>（2）黑市地下交易滋生：</a:t>
             </a:r>
             <a:r>
               <a:rPr sz="1150" b="0">
@@ -9237,7 +9237,7 @@
                 <a:latin typeface="Times New Roman"/>
                 <a:ea typeface="宋体"/>
               </a:rPr>
-              <a:t>（3）产品质量变相劣化： </a:t>
+              <a:t>（3）产品质量变相劣化：</a:t>
             </a:r>
             <a:r>
               <a:rPr sz="1150" b="0">
@@ -9267,7 +9267,7 @@
                 <a:latin typeface="Times New Roman"/>
                 <a:ea typeface="宋体"/>
               </a:rPr>
-              <a:t>（4）寻租腐败与权力干预： </a:t>
+              <a:t>（4）寻租腐败与权力干预：</a:t>
             </a:r>
             <a:r>
               <a:rPr sz="1150" b="0">
@@ -9297,7 +9297,7 @@
                 <a:latin typeface="Times New Roman"/>
                 <a:ea typeface="宋体"/>
               </a:rPr>
-              <a:t>（5）社会效率净损失： </a:t>
+              <a:t>（5）社会效率净损失：</a:t>
             </a:r>
             <a:r>
               <a:rPr sz="1150" b="0">
@@ -9364,7 +9364,7 @@
                 <a:latin typeface="Times New Roman"/>
                 <a:ea typeface="宋体"/>
               </a:rPr>
-              <a:t>  ★ 核心要点：最高限价虽然出于善意保护消费者，但若无政府配套财政补贴与保供，必然导致普遍短缺与黑市泛滥。</a:t>
+              <a:t>★ 核心要点：最高限价虽然出于善意保护消费者，但若无政府配套财政补贴与保供，必然导致普遍短缺与黑市泛滥。</a:t>
             </a:r>
           </a:p>
         </p:txBody>
@@ -9771,7 +9771,7 @@
                 <a:latin typeface="Times New Roman"/>
                 <a:ea typeface="宋体"/>
               </a:rPr>
-              <a:t>  1. 最低支持价格（Price Floor）政策机制</a:t>
+              <a:t>1. 最低支持价格（Price Floor）政策机制</a:t>
             </a:r>
           </a:p>
         </p:txBody>
@@ -9814,7 +9814,7 @@
                 <a:latin typeface="Times New Roman"/>
                 <a:ea typeface="宋体"/>
               </a:rPr>
-              <a:t>（1）政策出台目的： </a:t>
+              <a:t>（1）政策出台目的：</a:t>
             </a:r>
             <a:r>
               <a:rPr sz="1250" b="0">
@@ -9844,7 +9844,7 @@
                 <a:latin typeface="Times New Roman"/>
                 <a:ea typeface="宋体"/>
               </a:rPr>
-              <a:t>（2）实施生效前提： </a:t>
+              <a:t>（2）实施生效前提：</a:t>
             </a:r>
             <a:r>
               <a:rPr sz="1250" b="0">
@@ -9854,7 +9854,7 @@
                 <a:latin typeface="Times New Roman"/>
                 <a:ea typeface="宋体"/>
               </a:rPr>
-              <a:t>法定支持价 P_f 必须严格高于自由市场出清均衡价 P^*。</a:t>
+              <a:t>法定支持价 P_f 必须严格高于自由市场出清均衡价 P*。</a:t>
             </a:r>
           </a:p>
           <a:p>
@@ -9874,7 +9874,7 @@
                 <a:latin typeface="Times New Roman"/>
                 <a:ea typeface="宋体"/>
               </a:rPr>
-              <a:t>（3）直接市场表象： </a:t>
+              <a:t>（3）直接市场表象：</a:t>
             </a:r>
             <a:r>
               <a:rPr sz="1250" b="0">
@@ -9884,7 +9884,7 @@
                 <a:latin typeface="Times New Roman"/>
                 <a:ea typeface="宋体"/>
               </a:rPr>
-              <a:t>高价刺激生产者盲目扩产（Q_s 飙升），而消费者购买量急剧萎缩（Q_d 骤减），造成严重产品过剩。</a:t>
+              <a:t>高价刺激生产者盲目扩产（Qs 飙升），而消费者购买量急剧萎缩（Qd 骤减），造成严重产品过剩。</a:t>
             </a:r>
           </a:p>
         </p:txBody>
@@ -9984,7 +9984,7 @@
                 <a:latin typeface="Times New Roman"/>
                 <a:ea typeface="宋体"/>
               </a:rPr>
-              <a:t>  2. 最低支持价格的三大严重后果</a:t>
+              <a:t>2. 最低支持价格的三大严重后果</a:t>
             </a:r>
           </a:p>
         </p:txBody>
@@ -10027,7 +10027,7 @@
                 <a:latin typeface="Times New Roman"/>
                 <a:ea typeface="宋体"/>
               </a:rPr>
-              <a:t>（1）市场严重过剩与库存积压： </a:t>
+              <a:t>（1）市场严重过剩与库存积压：</a:t>
             </a:r>
             <a:r>
               <a:rPr sz="1250" b="0">
@@ -10057,7 +10057,7 @@
                 <a:latin typeface="Times New Roman"/>
                 <a:ea typeface="宋体"/>
               </a:rPr>
-              <a:t>（2）沉重的政府财政收购包袱： </a:t>
+              <a:t>（2）沉重的政府财政收购包袱：</a:t>
             </a:r>
             <a:r>
               <a:rPr sz="1250" b="0">
@@ -10087,7 +10087,7 @@
                 <a:latin typeface="Times New Roman"/>
                 <a:ea typeface="宋体"/>
               </a:rPr>
-              <a:t>（3）劳动力市场隐性失业风险： </a:t>
+              <a:t>（3）劳动力市场隐性失业风险：</a:t>
             </a:r>
             <a:r>
               <a:rPr sz="1250" b="0">
@@ -10154,7 +10154,7 @@
                 <a:latin typeface="Times New Roman"/>
                 <a:ea typeface="宋体"/>
               </a:rPr>
-              <a:t>  ★ 核心要点：价格管制必须审慎权衡公平与效率，脱离市场规律的干预往往带来高昂的财政与社会沉没成本。</a:t>
+              <a:t>★ 核心要点：价格管制必须审慎权衡公平与效率，脱离市场规律的干预往往带来高昂的财政与社会沉没成本。</a:t>
             </a:r>
           </a:p>
         </p:txBody>
@@ -10561,7 +10561,7 @@
                 <a:latin typeface="Times New Roman"/>
                 <a:ea typeface="宋体"/>
               </a:rPr>
-              <a:t>  1. 收敛型蛛网（D 弹性 &gt; S 弹性）</a:t>
+              <a:t>1. 收敛型蛛网（D 弹性 &gt; S 弹性）</a:t>
             </a:r>
           </a:p>
         </p:txBody>
@@ -10604,7 +10604,7 @@
                 <a:latin typeface="Times New Roman"/>
                 <a:ea typeface="宋体"/>
               </a:rPr>
-              <a:t>（1）斜率特征： </a:t>
+              <a:t>（1）斜率特征：</a:t>
             </a:r>
             <a:r>
               <a:rPr sz="1200" b="0">
@@ -10634,7 +10634,7 @@
                 <a:latin typeface="Times New Roman"/>
                 <a:ea typeface="宋体"/>
               </a:rPr>
-              <a:t>（2）动态收敛路径： </a:t>
+              <a:t>（2）动态收敛路径：</a:t>
             </a:r>
             <a:r>
               <a:rPr sz="1200" b="0">
@@ -10664,7 +10664,7 @@
                 <a:latin typeface="Times New Roman"/>
                 <a:ea typeface="宋体"/>
               </a:rPr>
-              <a:t>（3）经济学含义： </a:t>
+              <a:t>（3）经济学含义：</a:t>
             </a:r>
             <a:r>
               <a:rPr sz="1200" b="0">
@@ -10774,7 +10774,7 @@
                 <a:latin typeface="Times New Roman"/>
                 <a:ea typeface="宋体"/>
               </a:rPr>
-              <a:t>  2. 发散型蛛网（D 弹性 &lt; S 弹性）</a:t>
+              <a:t>2. 发散型蛛网（D 弹性 &lt; S 弹性）</a:t>
             </a:r>
           </a:p>
         </p:txBody>
@@ -10817,7 +10817,7 @@
                 <a:latin typeface="Times New Roman"/>
                 <a:ea typeface="宋体"/>
               </a:rPr>
-              <a:t>（1）斜率特征： </a:t>
+              <a:t>（1）斜率特征：</a:t>
             </a:r>
             <a:r>
               <a:rPr sz="1200" b="0">
@@ -10847,7 +10847,7 @@
                 <a:latin typeface="Times New Roman"/>
                 <a:ea typeface="宋体"/>
               </a:rPr>
-              <a:t>（2）动态发散路径： </a:t>
+              <a:t>（2）动态发散路径：</a:t>
             </a:r>
             <a:r>
               <a:rPr sz="1200" b="0">
@@ -10877,7 +10877,7 @@
                 <a:latin typeface="Times New Roman"/>
                 <a:ea typeface="宋体"/>
               </a:rPr>
-              <a:t>（3）经济学含义： </a:t>
+              <a:t>（3）经济学含义：</a:t>
             </a:r>
             <a:r>
               <a:rPr sz="1200" b="0">
@@ -10987,7 +10987,7 @@
                 <a:latin typeface="Times New Roman"/>
                 <a:ea typeface="宋体"/>
               </a:rPr>
-              <a:t>  3. 封闭型蛛网（D 弹性 = S 弹性）</a:t>
+              <a:t>3. 封闭型蛛网（D 弹性 = S 弹性）</a:t>
             </a:r>
           </a:p>
         </p:txBody>
@@ -11030,7 +11030,7 @@
                 <a:latin typeface="Times New Roman"/>
                 <a:ea typeface="宋体"/>
               </a:rPr>
-              <a:t>（1）斜率特征： </a:t>
+              <a:t>（1）斜率特征：</a:t>
             </a:r>
             <a:r>
               <a:rPr sz="1200" b="0">
@@ -11060,7 +11060,7 @@
                 <a:latin typeface="Times New Roman"/>
                 <a:ea typeface="宋体"/>
               </a:rPr>
-              <a:t>（2）闭环振荡路径： </a:t>
+              <a:t>（2）闭环振荡路径：</a:t>
             </a:r>
             <a:r>
               <a:rPr sz="1200" b="0">
@@ -11090,7 +11090,7 @@
                 <a:latin typeface="Times New Roman"/>
                 <a:ea typeface="宋体"/>
               </a:rPr>
-              <a:t>（3）经典现实： </a:t>
+              <a:t>（3）经典现实：</a:t>
             </a:r>
             <a:r>
               <a:rPr sz="1200" b="0">
@@ -11157,7 +11157,7 @@
                 <a:latin typeface="Times New Roman"/>
                 <a:ea typeface="宋体"/>
               </a:rPr>
-              <a:t>  ★ 核心要点：蛛网模型深刻揭示了生产存在时间滞后期的农牧业周期性波动根源，为企业跨周期排产提供理论支撑。</a:t>
+              <a:t>★ 核心要点：蛛网模型深刻揭示了生产存在时间滞后期的农牧业周期性波动根源，为企业跨周期排产提供理论支撑。</a:t>
             </a:r>
           </a:p>
         </p:txBody>
@@ -13466,7 +13466,7 @@
                 <a:latin typeface="Times New Roman"/>
                 <a:ea typeface="宋体"/>
               </a:rPr>
-              <a:t>  1. 欲望、效用与总效用函数</a:t>
+              <a:t>1. 欲望、效用与总效用函数</a:t>
             </a:r>
           </a:p>
         </p:txBody>
@@ -13509,7 +13509,7 @@
                 <a:latin typeface="Times New Roman"/>
                 <a:ea typeface="宋体"/>
               </a:rPr>
-              <a:t>（1）效用（Utility）定义： </a:t>
+              <a:t>（1）效用（Utility）定义：</a:t>
             </a:r>
             <a:r>
               <a:rPr sz="1250" b="0">
@@ -13539,7 +13539,7 @@
                 <a:latin typeface="Times New Roman"/>
                 <a:ea typeface="宋体"/>
               </a:rPr>
-              <a:t>（2）总效用函数 TU(Q)： </a:t>
+              <a:t>（2）总效用函数 TU(Q)：</a:t>
             </a:r>
             <a:r>
               <a:rPr sz="1250" b="0">
@@ -13569,7 +13569,7 @@
                 <a:latin typeface="Times New Roman"/>
                 <a:ea typeface="宋体"/>
               </a:rPr>
-              <a:t>（3）边际效用 (MU) 公式： </a:t>
+              <a:t>（3）边际效用 (MU) 公式：</a:t>
             </a:r>
             <a:r>
               <a:rPr sz="1250" b="0">
@@ -13579,7 +13579,7 @@
                 <a:latin typeface="Times New Roman"/>
                 <a:ea typeface="宋体"/>
               </a:rPr>
-              <a:t>MU = \frac{\Delta TU}{\Delta Q} = \frac{dTU}{dQ}（消费量每增加 1 单位所引起的总效用增量）。</a:t>
+              <a:t>MU = (Δ TU) / (Δ Q) = dTU / dQ（消费量每增加 1 单位所引起的总效用增量）。</a:t>
             </a:r>
           </a:p>
         </p:txBody>
@@ -13679,7 +13679,7 @@
                 <a:latin typeface="Times New Roman"/>
                 <a:ea typeface="宋体"/>
               </a:rPr>
-              <a:t>  2. 边际效用递减规律与消费者剩余</a:t>
+              <a:t>2. 边际效用递减规律与消费者剩余</a:t>
             </a:r>
           </a:p>
         </p:txBody>
@@ -13722,7 +13722,7 @@
                 <a:latin typeface="Times New Roman"/>
                 <a:ea typeface="宋体"/>
               </a:rPr>
-              <a:t>（1）边际效用递减规律： </a:t>
+              <a:t>（1）边际效用递减规律：</a:t>
             </a:r>
             <a:r>
               <a:rPr sz="1250" b="0">
@@ -13752,7 +13752,7 @@
                 <a:latin typeface="Times New Roman"/>
                 <a:ea typeface="宋体"/>
               </a:rPr>
-              <a:t>（2）水与钻石价值悖论： </a:t>
+              <a:t>（2）水与钻石价值悖论：</a:t>
             </a:r>
             <a:r>
               <a:rPr sz="1250" b="0">
@@ -13782,7 +13782,7 @@
                 <a:latin typeface="Times New Roman"/>
                 <a:ea typeface="宋体"/>
               </a:rPr>
-              <a:t>（3）消费者剩余（Consumer Surplus）： </a:t>
+              <a:t>（3）消费者剩余（Consumer Surplus）：</a:t>
             </a:r>
             <a:r>
               <a:rPr sz="1250" b="0">
@@ -13849,7 +13849,7 @@
                 <a:latin typeface="Times New Roman"/>
                 <a:ea typeface="宋体"/>
               </a:rPr>
-              <a:t>  ★ 核心要点：边际效用决定商品的市场价格，而非总效用；边际效用递减规律构成了负斜率需求曲线的心理基础。</a:t>
+              <a:t>★ 核心要点：边际效用决定商品的市场价格，而非总效用；边际效用递减规律构成了负斜率需求曲线的心理基础。</a:t>
             </a:r>
           </a:p>
         </p:txBody>
@@ -14256,7 +14256,7 @@
                 <a:latin typeface="Times New Roman"/>
                 <a:ea typeface="宋体"/>
               </a:rPr>
-              <a:t>  1. 无差异曲线（Indifference Curve）的界定</a:t>
+              <a:t>1. 无差异曲线（Indifference Curve）的界定</a:t>
             </a:r>
           </a:p>
         </p:txBody>
@@ -14299,7 +14299,7 @@
                 <a:latin typeface="Times New Roman"/>
                 <a:ea typeface="宋体"/>
               </a:rPr>
-              <a:t>（1）序数效用概念： </a:t>
+              <a:t>（1）序数效用概念：</a:t>
             </a:r>
             <a:r>
               <a:rPr sz="1250" b="0">
@@ -14329,7 +14329,7 @@
                 <a:latin typeface="Times New Roman"/>
                 <a:ea typeface="宋体"/>
               </a:rPr>
-              <a:t>（2）无差异曲线定义： </a:t>
+              <a:t>（2）无差异曲线定义：</a:t>
             </a:r>
             <a:r>
               <a:rPr sz="1250" b="0">
@@ -14359,7 +14359,7 @@
                 <a:latin typeface="Times New Roman"/>
                 <a:ea typeface="宋体"/>
               </a:rPr>
-              <a:t>（3）边际替代率（MRS）： </a:t>
+              <a:t>（3）边际替代率（MRS）：</a:t>
             </a:r>
             <a:r>
               <a:rPr sz="1250" b="0">
@@ -14369,7 +14369,7 @@
                 <a:latin typeface="Times New Roman"/>
                 <a:ea typeface="宋体"/>
               </a:rPr>
-              <a:t>MRS_{xy} = -\frac{\Delta Y}{\Delta X} = \frac{MU_x}{MU_y}（维持效用不变时，增加 1 单位 X 商品所愿意放弃的 Y 商品数量）。</a:t>
+              <a:t>MRS_xy = -(Δ Y) / (Δ X) = MU_x / MU_y（维持效用不变时，增加 1 单位 X 商品所愿意放弃的 Y 商品数量）。</a:t>
             </a:r>
           </a:p>
         </p:txBody>
@@ -14469,7 +14469,7 @@
                 <a:latin typeface="Times New Roman"/>
                 <a:ea typeface="宋体"/>
               </a:rPr>
-              <a:t>  2. 无差异曲线四大基本特征</a:t>
+              <a:t>2. 无差异曲线四大基本特征</a:t>
             </a:r>
           </a:p>
         </p:txBody>
@@ -14512,7 +14512,7 @@
                 <a:latin typeface="Times New Roman"/>
                 <a:ea typeface="宋体"/>
               </a:rPr>
-              <a:t>（1）特征一（负斜率）： </a:t>
+              <a:t>（1）特征一（负斜率）：</a:t>
             </a:r>
             <a:r>
               <a:rPr sz="1250" b="0">
@@ -14542,7 +14542,7 @@
                 <a:latin typeface="Times New Roman"/>
                 <a:ea typeface="宋体"/>
               </a:rPr>
-              <a:t>（2）特征二（凸向原点）： </a:t>
+              <a:t>（2）特征二（凸向原点）：</a:t>
             </a:r>
             <a:r>
               <a:rPr sz="1250" b="0">
@@ -14552,7 +14552,7 @@
                 <a:latin typeface="Times New Roman"/>
                 <a:ea typeface="宋体"/>
               </a:rPr>
-              <a:t>边际替代率递减规律（MRS_{xy} 随 X 增加而持续下降）。</a:t>
+              <a:t>边际替代率递减规律（MRS_xy 随 X 增加而持续下降）。</a:t>
             </a:r>
           </a:p>
           <a:p>
@@ -14572,7 +14572,7 @@
                 <a:latin typeface="Times New Roman"/>
                 <a:ea typeface="宋体"/>
               </a:rPr>
-              <a:t>（3）特征三（永不相交）： </a:t>
+              <a:t>（3）特征三（永不相交）：</a:t>
             </a:r>
             <a:r>
               <a:rPr sz="1250" b="0">
@@ -14602,7 +14602,7 @@
                 <a:latin typeface="Times New Roman"/>
                 <a:ea typeface="宋体"/>
               </a:rPr>
-              <a:t>（4）特征四（离原点越远效用越高）： </a:t>
+              <a:t>（4）特征四（离原点越远效用越高）：</a:t>
             </a:r>
             <a:r>
               <a:rPr sz="1250" b="0">
@@ -14669,7 +14669,7 @@
                 <a:latin typeface="Times New Roman"/>
                 <a:ea typeface="宋体"/>
               </a:rPr>
-              <a:t>  ★ 核心要点：无差异曲线是现代微观经济学刻画消费者主观偏好偏好序列的严密几何与数理语言。</a:t>
+              <a:t>★ 核心要点：无差异曲线是现代微观经济学刻画消费者主观偏好偏好序列的严密几何与数理语言。</a:t>
             </a:r>
           </a:p>
         </p:txBody>
@@ -15076,7 +15076,7 @@
                 <a:latin typeface="Times New Roman"/>
                 <a:ea typeface="宋体"/>
               </a:rPr>
-              <a:t>  1. 预算约束线（Budget Constraint Line）</a:t>
+              <a:t>1. 预算约束线（Budget Constraint Line）</a:t>
             </a:r>
           </a:p>
         </p:txBody>
@@ -15119,7 +15119,7 @@
                 <a:latin typeface="Times New Roman"/>
                 <a:ea typeface="宋体"/>
               </a:rPr>
-              <a:t>（1）预算方程： </a:t>
+              <a:t>（1）预算方程：</a:t>
             </a:r>
             <a:r>
               <a:rPr sz="1250" b="0">
@@ -15129,7 +15129,7 @@
                 <a:latin typeface="Times New Roman"/>
                 <a:ea typeface="宋体"/>
               </a:rPr>
-              <a:t>I = P_x X + P_y Y \implies Y = \frac{I}{P_y} - \frac{P_x}{P_y} X</a:t>
+              <a:t>I = P_x X + P_y Y ⇒ Y = I / P_y - P_x / P_y X</a:t>
             </a:r>
           </a:p>
           <a:p>
@@ -15149,7 +15149,7 @@
                 <a:latin typeface="Times New Roman"/>
                 <a:ea typeface="宋体"/>
               </a:rPr>
-              <a:t>（2）几何斜率： </a:t>
+              <a:t>（2）几何斜率：</a:t>
             </a:r>
             <a:r>
               <a:rPr sz="1250" b="0">
@@ -15179,7 +15179,7 @@
                 <a:latin typeface="Times New Roman"/>
                 <a:ea typeface="宋体"/>
               </a:rPr>
-              <a:t>（3）变动规律： </a:t>
+              <a:t>（3）变动规律：</a:t>
             </a:r>
             <a:r>
               <a:rPr sz="1250" b="0">
@@ -15289,7 +15289,7 @@
                 <a:latin typeface="Times New Roman"/>
                 <a:ea typeface="宋体"/>
               </a:rPr>
-              <a:t>  2. 消费者最优均衡切点定理</a:t>
+              <a:t>2. 消费者最优均衡切点定理</a:t>
             </a:r>
           </a:p>
         </p:txBody>
@@ -15332,7 +15332,7 @@
                 <a:latin typeface="Times New Roman"/>
                 <a:ea typeface="宋体"/>
               </a:rPr>
-              <a:t>（1）极值切点条件： </a:t>
+              <a:t>（1）极值切点条件：</a:t>
             </a:r>
             <a:r>
               <a:rPr sz="1250" b="0">
@@ -15342,7 +15342,7 @@
                 <a:latin typeface="Times New Roman"/>
                 <a:ea typeface="宋体"/>
               </a:rPr>
-              <a:t>无差异曲线与预算约束线相切于点 E^*，切点处两条线的斜率完全相等：</a:t>
+              <a:t>无差异曲线与预算约束线相切于点 E*，切点处两条线的斜率完全相等：</a:t>
             </a:r>
           </a:p>
           <a:p>
@@ -15362,7 +15362,7 @@
                 <a:latin typeface="Times New Roman"/>
                 <a:ea typeface="宋体"/>
               </a:rPr>
-              <a:t>（2）数学等式： </a:t>
+              <a:t>（2）数学等式：</a:t>
             </a:r>
             <a:r>
               <a:rPr sz="1250" b="0">
@@ -15372,7 +15372,7 @@
                 <a:latin typeface="Times New Roman"/>
                 <a:ea typeface="宋体"/>
               </a:rPr>
-              <a:t>MRS_{xy} = \frac{P_x}{P_y} \iff \frac{MU_x}{MU_y} = \frac{P_x}{P_y} \iff \frac{MU_x}{P_x} = \frac{MU_y}{P_y} = \lambda</a:t>
+              <a:t>MRS_xy = P_x / P_y ⇔ MU_x / MU_y = P_x / P_y ⇔ MU_x / P_x = MU_y / P_y = λ</a:t>
             </a:r>
           </a:p>
           <a:p>
@@ -15392,7 +15392,7 @@
                 <a:latin typeface="Times New Roman"/>
                 <a:ea typeface="宋体"/>
               </a:rPr>
-              <a:t>（3）等边际法则精髓： </a:t>
+              <a:t>（3）等边际法则精髓：</a:t>
             </a:r>
             <a:r>
               <a:rPr sz="1250" b="0">
@@ -15422,7 +15422,7 @@
                 <a:latin typeface="Times New Roman"/>
                 <a:ea typeface="宋体"/>
               </a:rPr>
-              <a:t>（4）例1-2 实操计算： </a:t>
+              <a:t>（4）例1-2 实操计算：</a:t>
             </a:r>
             <a:r>
               <a:rPr sz="1250" b="0">
@@ -15432,7 +15432,7 @@
                 <a:latin typeface="Times New Roman"/>
                 <a:ea typeface="宋体"/>
               </a:rPr>
-              <a:t>已知 U=XY, I=100, P_x=5, P_y=10 \implies 最优消费组合为 X^*=10, Y^*=5。</a:t>
+              <a:t>已知 U=XY, I=100, P_x=5, P_y=10 ⇒ 最优消费组合为 X*=10, Y*=5。</a:t>
             </a:r>
           </a:p>
         </p:txBody>
@@ -15489,7 +15489,7 @@
                 <a:latin typeface="Times New Roman"/>
                 <a:ea typeface="宋体"/>
               </a:rPr>
-              <a:t>  ★ 核心要点：消费者均衡定理证明了理性人如何在有限预算约束下，通过边际效用与市场价格的权衡实现效用最大化。</a:t>
+              <a:t>★ 核心要点：消费者均衡定理证明了理性人如何在有限预算约束下，通过边际效用与市场价格的权衡实现效用最大化。</a:t>
             </a:r>
           </a:p>
         </p:txBody>
@@ -15896,7 +15896,7 @@
                 <a:latin typeface="Times New Roman"/>
                 <a:ea typeface="宋体"/>
               </a:rPr>
-              <a:t>  需求机制与规律</a:t>
+              <a:t>需求机制与规律</a:t>
             </a:r>
           </a:p>
         </p:txBody>
@@ -16100,7 +16100,7 @@
                 <a:latin typeface="Times New Roman"/>
                 <a:ea typeface="宋体"/>
               </a:rPr>
-              <a:t>  供给机制与生产</a:t>
+              <a:t>供给机制与生产</a:t>
             </a:r>
           </a:p>
         </p:txBody>
@@ -16304,7 +16304,7 @@
                 <a:latin typeface="Times New Roman"/>
                 <a:ea typeface="宋体"/>
               </a:rPr>
-              <a:t>  市场均衡与干预</a:t>
+              <a:t>市场均衡与干预</a:t>
             </a:r>
           </a:p>
         </p:txBody>
@@ -16508,7 +16508,7 @@
                 <a:latin typeface="Times New Roman"/>
                 <a:ea typeface="宋体"/>
               </a:rPr>
-              <a:t>  消费者选择理论</a:t>
+              <a:t>消费者选择理论</a:t>
             </a:r>
           </a:p>
         </p:txBody>
@@ -16669,7 +16669,7 @@
                 <a:latin typeface="Times New Roman"/>
                 <a:ea typeface="宋体"/>
               </a:rPr>
-              <a:t>  ★ 战略结语：供求机制是微观经济运行的中枢神经，深刻理解供求法则与弹性转嫁规律是做出正确企业经营决策的前提。</a:t>
+              <a:t>★ 战略结语：供求机制是微观经济运行的中枢神经，深刻理解供求法则与弹性转嫁规律是做出正确企业经营决策的前提。</a:t>
             </a:r>
           </a:p>
         </p:txBody>
@@ -17076,7 +17076,7 @@
                 <a:latin typeface="Times New Roman"/>
                 <a:ea typeface="宋体"/>
               </a:rPr>
-              <a:t>  课后复习思考题与 MBA 讨论案例（严格对应课本习题）</a:t>
+              <a:t>课后复习思考题与 MBA 讨论案例（严格对应课本习题）</a:t>
             </a:r>
           </a:p>
         </p:txBody>
@@ -17119,7 +17119,7 @@
                 <a:latin typeface="Times New Roman"/>
                 <a:ea typeface="宋体"/>
               </a:rPr>
-              <a:t>1. </a:t>
+              <a:t>1.</a:t>
             </a:r>
             <a:r>
               <a:rPr sz="1150" b="0">
@@ -17149,7 +17149,7 @@
                 <a:latin typeface="Times New Roman"/>
                 <a:ea typeface="宋体"/>
               </a:rPr>
-              <a:t>2. </a:t>
+              <a:t>2.</a:t>
             </a:r>
             <a:r>
               <a:rPr sz="1150" b="0">
@@ -17179,7 +17179,7 @@
                 <a:latin typeface="Times New Roman"/>
                 <a:ea typeface="宋体"/>
               </a:rPr>
-              <a:t>3. </a:t>
+              <a:t>3.</a:t>
             </a:r>
             <a:r>
               <a:rPr sz="1150" b="0">
@@ -17209,7 +17209,7 @@
                 <a:latin typeface="Times New Roman"/>
                 <a:ea typeface="宋体"/>
               </a:rPr>
-              <a:t>4. </a:t>
+              <a:t>4.</a:t>
             </a:r>
             <a:r>
               <a:rPr sz="1150" b="0">
@@ -17239,7 +17239,7 @@
                 <a:latin typeface="Times New Roman"/>
                 <a:ea typeface="宋体"/>
               </a:rPr>
-              <a:t>5. </a:t>
+              <a:t>5.</a:t>
             </a:r>
             <a:r>
               <a:rPr sz="1150" b="0">
@@ -17269,7 +17269,7 @@
                 <a:latin typeface="Times New Roman"/>
                 <a:ea typeface="宋体"/>
               </a:rPr>
-              <a:t>6. </a:t>
+              <a:t>6.</a:t>
             </a:r>
             <a:r>
               <a:rPr sz="1150" b="0">
@@ -17279,7 +17279,7 @@
                 <a:latin typeface="Times New Roman"/>
                 <a:ea typeface="宋体"/>
               </a:rPr>
-              <a:t>【作业题1】某商品市场需求函数为 Q_d = 800 - 100P，供给函数为 Q_s = -400 + 200P。求市场均衡价格与均衡交易量。</a:t>
+              <a:t>【作业题1】某商品市场需求函数为 Qd = 800 - 100P，供给函数为 Qs = -400 + 200P。求市场均衡价格与均衡交易量。</a:t>
             </a:r>
           </a:p>
           <a:p>
@@ -17299,7 +17299,7 @@
                 <a:latin typeface="Times New Roman"/>
                 <a:ea typeface="宋体"/>
               </a:rPr>
-              <a:t>7. </a:t>
+              <a:t>7.</a:t>
             </a:r>
             <a:r>
               <a:rPr sz="1150" b="0">
@@ -18023,7 +18023,7 @@
                 <a:latin typeface="Times New Roman"/>
                 <a:ea typeface="宋体"/>
               </a:rPr>
-              <a:t>  1. 需求与需求量的严格经济学界定</a:t>
+              <a:t>1. 需求与需求量的严格经济学界定</a:t>
             </a:r>
           </a:p>
         </p:txBody>
@@ -18066,7 +18066,7 @@
                 <a:latin typeface="Times New Roman"/>
                 <a:ea typeface="宋体"/>
               </a:rPr>
-              <a:t>（1）需求的本质： </a:t>
+              <a:t>（1）需求的本质：</a:t>
             </a:r>
             <a:r>
               <a:rPr sz="1250" b="0">
@@ -18096,7 +18096,7 @@
                 <a:latin typeface="Times New Roman"/>
                 <a:ea typeface="宋体"/>
               </a:rPr>
-              <a:t>（2）有效需求两要素： </a:t>
+              <a:t>（2）有效需求两要素：</a:t>
             </a:r>
             <a:r>
               <a:rPr sz="1250" b="0">
@@ -18126,7 +18126,7 @@
                 <a:latin typeface="Times New Roman"/>
                 <a:ea typeface="宋体"/>
               </a:rPr>
-              <a:t>（3）需求量的定义： </a:t>
+              <a:t>（3）需求量的定义：</a:t>
             </a:r>
             <a:r>
               <a:rPr sz="1250" b="0">
@@ -18156,7 +18156,7 @@
                 <a:latin typeface="Times New Roman"/>
                 <a:ea typeface="宋体"/>
               </a:rPr>
-              <a:t>（4）需求规律（Law of Demand）： </a:t>
+              <a:t>（4）需求规律（Law of Demand）：</a:t>
             </a:r>
             <a:r>
               <a:rPr sz="1250" b="0">
@@ -18266,7 +18266,7 @@
                 <a:latin typeface="Times New Roman"/>
                 <a:ea typeface="宋体"/>
               </a:rPr>
-              <a:t>  2. 需求函数与需求曲线形态</a:t>
+              <a:t>2. 需求函数与需求曲线形态</a:t>
             </a:r>
           </a:p>
         </p:txBody>
@@ -18309,7 +18309,7 @@
                 <a:latin typeface="Times New Roman"/>
                 <a:ea typeface="宋体"/>
               </a:rPr>
-              <a:t>（1）广义需求函数： </a:t>
+              <a:t>（1）广义需求函数：</a:t>
             </a:r>
             <a:r>
               <a:rPr sz="1250" b="0">
@@ -18319,7 +18319,7 @@
                 <a:latin typeface="Times New Roman"/>
                 <a:ea typeface="宋体"/>
               </a:rPr>
-              <a:t>Q_d = f(P, I, P_r, T, E, A, N)，其中 P 为自身价格，I 为收入，P_r 为相关品价格。</a:t>
+              <a:t>Qd = f(P, I, Pᵣ, T, E, A, N)，其中 P 为自身价格，I 为收入，Pᵣ 为相关品价格。</a:t>
             </a:r>
           </a:p>
           <a:p>
@@ -18339,7 +18339,7 @@
                 <a:latin typeface="Times New Roman"/>
                 <a:ea typeface="宋体"/>
               </a:rPr>
-              <a:t>（2）线性需求方程： </a:t>
+              <a:t>（2）线性需求方程：</a:t>
             </a:r>
             <a:r>
               <a:rPr sz="1250" b="0">
@@ -18349,7 +18349,7 @@
                 <a:latin typeface="Times New Roman"/>
                 <a:ea typeface="宋体"/>
               </a:rPr>
-              <a:t>Q_d = \alpha - \beta P \quad (\alpha, \beta &gt; 0)，其中 \beta 反映需求量对价格变动的敏感度。</a:t>
+              <a:t>Qd = α - β P (α, β &gt; 0)，其中 β 反映需求量对价格变动的敏感度。</a:t>
             </a:r>
           </a:p>
           <a:p>
@@ -18369,7 +18369,7 @@
                 <a:latin typeface="Times New Roman"/>
                 <a:ea typeface="宋体"/>
               </a:rPr>
-              <a:t>（3）反需求函数形式： </a:t>
+              <a:t>（3）反需求函数形式：</a:t>
             </a:r>
             <a:r>
               <a:rPr sz="1250" b="0">
@@ -18379,7 +18379,7 @@
                 <a:latin typeface="Times New Roman"/>
                 <a:ea typeface="宋体"/>
               </a:rPr>
-              <a:t>P = a - b Q_d，在坐标系中纵轴为价格 P，横轴为需求量 Q，呈现向右下方倾斜的特征。</a:t>
+              <a:t>P = a - b·Qd，在坐标系中纵轴为价格 P，横轴为需求量 Q，呈现向右下方倾斜的特征。</a:t>
             </a:r>
           </a:p>
           <a:p>
@@ -18399,7 +18399,7 @@
                 <a:latin typeface="Times New Roman"/>
                 <a:ea typeface="宋体"/>
               </a:rPr>
-              <a:t>（4）斜率为负的微观根源： </a:t>
+              <a:t>（4）斜率为负的微观根源：</a:t>
             </a:r>
             <a:r>
               <a:rPr sz="1250" b="0">
@@ -18466,7 +18466,7 @@
                 <a:latin typeface="Times New Roman"/>
                 <a:ea typeface="宋体"/>
               </a:rPr>
-              <a:t>  ★ 核心要点：需求规律是市场经济的第一大基本法则，负斜率需求曲线反映了消费者理性选择的普遍行为特征。</a:t>
+              <a:t>★ 核心要点：需求规律是市场经济的第一大基本法则，负斜率需求曲线反映了消费者理性选择的普遍行为特征。</a:t>
             </a:r>
           </a:p>
         </p:txBody>
@@ -18873,7 +18873,7 @@
                 <a:latin typeface="Times New Roman"/>
                 <a:ea typeface="宋体"/>
               </a:rPr>
-              <a:t>  1. 商品自身价格 (P)</a:t>
+              <a:t>1. 商品自身价格 (P)</a:t>
             </a:r>
           </a:p>
         </p:txBody>
@@ -18916,7 +18916,7 @@
                 <a:latin typeface="Times New Roman"/>
                 <a:ea typeface="宋体"/>
               </a:rPr>
-              <a:t>（1）自身价格变量： </a:t>
+              <a:t>（1）自身价格变量：</a:t>
             </a:r>
             <a:r>
               <a:rPr sz="1200" b="0">
@@ -18946,7 +18946,7 @@
                 <a:latin typeface="Times New Roman"/>
                 <a:ea typeface="宋体"/>
               </a:rPr>
-              <a:t>（2）变动机制： </a:t>
+              <a:t>（2）变动机制：</a:t>
             </a:r>
             <a:r>
               <a:rPr sz="1200" b="0">
@@ -18976,7 +18976,7 @@
                 <a:latin typeface="Times New Roman"/>
                 <a:ea typeface="宋体"/>
               </a:rPr>
-              <a:t>（3）价格信号传导： </a:t>
+              <a:t>（3）价格信号传导：</a:t>
             </a:r>
             <a:r>
               <a:rPr sz="1200" b="0">
@@ -19086,7 +19086,7 @@
                 <a:latin typeface="Times New Roman"/>
                 <a:ea typeface="宋体"/>
               </a:rPr>
-              <a:t>  2. 消费者收入水平 (I)</a:t>
+              <a:t>2. 消费者收入水平 (I)</a:t>
             </a:r>
           </a:p>
         </p:txBody>
@@ -19129,7 +19129,7 @@
                 <a:latin typeface="Times New Roman"/>
                 <a:ea typeface="宋体"/>
               </a:rPr>
-              <a:t>（2）消费者可支配收入： </a:t>
+              <a:t>（2）消费者可支配收入：</a:t>
             </a:r>
             <a:r>
               <a:rPr sz="1200" b="0">
@@ -19159,7 +19159,7 @@
                 <a:latin typeface="Times New Roman"/>
                 <a:ea typeface="宋体"/>
               </a:rPr>
-              <a:t>（3）正常品（Normal Goods）： </a:t>
+              <a:t>（3）正常品（Normal Goods）：</a:t>
             </a:r>
             <a:r>
               <a:rPr sz="1200" b="0">
@@ -19189,7 +19189,7 @@
                 <a:latin typeface="Times New Roman"/>
                 <a:ea typeface="宋体"/>
               </a:rPr>
-              <a:t>（4）劣等品（Inferior Goods）： </a:t>
+              <a:t>（4）劣等品（Inferior Goods）：</a:t>
             </a:r>
             <a:r>
               <a:rPr sz="1200" b="0">
@@ -19299,7 +19299,7 @@
                 <a:latin typeface="Times New Roman"/>
                 <a:ea typeface="宋体"/>
               </a:rPr>
-              <a:t>  3. 市场消费群体规模 (N)</a:t>
+              <a:t>3. 市场消费群体规模 (N)</a:t>
             </a:r>
           </a:p>
         </p:txBody>
@@ -19342,7 +19342,7 @@
                 <a:latin typeface="Times New Roman"/>
                 <a:ea typeface="宋体"/>
               </a:rPr>
-              <a:t>（3）人口总量与结构： </a:t>
+              <a:t>（3）人口总量与结构：</a:t>
             </a:r>
             <a:r>
               <a:rPr sz="1200" b="0">
@@ -19372,7 +19372,7 @@
                 <a:latin typeface="Times New Roman"/>
                 <a:ea typeface="宋体"/>
               </a:rPr>
-              <a:t>（5）人口结构演变： </a:t>
+              <a:t>（5）人口结构演变：</a:t>
             </a:r>
             <a:r>
               <a:rPr sz="1200" b="0">
@@ -19439,7 +19439,7 @@
                 <a:latin typeface="Times New Roman"/>
                 <a:ea typeface="宋体"/>
               </a:rPr>
-              <a:t>  ★ 核心要点：自身价格决定曲线上点的移动，而收入水平与人口规模是驱动整条需求曲线空间平移的关键宏观外生变量。</a:t>
+              <a:t>★ 核心要点：自身价格决定曲线上点的移动，而收入水平与人口规模是驱动整条需求曲线空间平移的关键宏观外生变量。</a:t>
             </a:r>
           </a:p>
         </p:txBody>
@@ -19846,7 +19846,7 @@
                 <a:latin typeface="Times New Roman"/>
                 <a:ea typeface="宋体"/>
               </a:rPr>
-              <a:t>  4. 相关商品价格 (Pr)</a:t>
+              <a:t>4. 相关商品价格 (Pr)</a:t>
             </a:r>
           </a:p>
         </p:txBody>
@@ -19889,7 +19889,7 @@
                 <a:latin typeface="Times New Roman"/>
                 <a:ea typeface="宋体"/>
               </a:rPr>
-              <a:t>（4）替代品价格 (P_sub)： </a:t>
+              <a:t>（4）替代品价格 (P_sub)：</a:t>
             </a:r>
             <a:r>
               <a:rPr sz="1200" b="0">
@@ -19919,7 +19919,7 @@
                 <a:latin typeface="Times New Roman"/>
                 <a:ea typeface="宋体"/>
               </a:rPr>
-              <a:t>（5）互补品价格 (P_com)： </a:t>
+              <a:t>（5）互补品价格 (P_com)：</a:t>
             </a:r>
             <a:r>
               <a:rPr sz="1200" b="0">
@@ -20029,7 +20029,7 @@
                 <a:latin typeface="Times New Roman"/>
                 <a:ea typeface="宋体"/>
               </a:rPr>
-              <a:t>  5. 消费者偏好 (T)</a:t>
+              <a:t>5. 消费者偏好 (T)</a:t>
             </a:r>
           </a:p>
         </p:txBody>
@@ -20072,7 +20072,7 @@
                 <a:latin typeface="Times New Roman"/>
                 <a:ea typeface="宋体"/>
               </a:rPr>
-              <a:t>（6）消费者主观偏好： </a:t>
+              <a:t>（6）消费者主观偏好：</a:t>
             </a:r>
             <a:r>
               <a:rPr sz="1200" b="0">
@@ -20102,7 +20102,7 @@
                 <a:latin typeface="Times New Roman"/>
                 <a:ea typeface="宋体"/>
               </a:rPr>
-              <a:t>• 偏好增强： </a:t>
+              <a:t>• 偏好增强：</a:t>
             </a:r>
             <a:r>
               <a:rPr sz="1200" b="0">
@@ -20212,7 +20212,7 @@
                 <a:latin typeface="Times New Roman"/>
                 <a:ea typeface="宋体"/>
               </a:rPr>
-              <a:t>  6. 未来预期与广告促销</a:t>
+              <a:t>6. 未来预期与广告促销</a:t>
             </a:r>
           </a:p>
         </p:txBody>
@@ -20255,7 +20255,7 @@
                 <a:latin typeface="Times New Roman"/>
                 <a:ea typeface="宋体"/>
               </a:rPr>
-              <a:t>（7）未来价格与供给预期 (E)： </a:t>
+              <a:t>（7）未来价格与供给预期 (E)：</a:t>
             </a:r>
             <a:r>
               <a:rPr sz="1200" b="0">
@@ -20285,7 +20285,7 @@
                 <a:latin typeface="Times New Roman"/>
                 <a:ea typeface="宋体"/>
               </a:rPr>
-              <a:t>• 广告与品牌营销 (A)： </a:t>
+              <a:t>• 广告与品牌营销 (A)：</a:t>
             </a:r>
             <a:r>
               <a:rPr sz="1200" b="0">
@@ -20352,7 +20352,7 @@
                 <a:latin typeface="Times New Roman"/>
                 <a:ea typeface="宋体"/>
               </a:rPr>
-              <a:t>  ★ 核心要点：跨品类价格联动、偏好演化与未来预期构成了企业在进行市场需求研判时不可忽视的外部生态系统。</a:t>
+              <a:t>★ 核心要点：跨品类价格联动、偏好演化与未来预期构成了企业在进行市场需求研判时不可忽视的外部生态系统。</a:t>
             </a:r>
           </a:p>
         </p:txBody>
@@ -20759,7 +20759,7 @@
                 <a:latin typeface="Times New Roman"/>
                 <a:ea typeface="宋体"/>
               </a:rPr>
-              <a:t>  1. 需求量的变动（Change in Quantity Demanded）</a:t>
+              <a:t>1. 需求量的变动（Change in Quantity Demanded）</a:t>
             </a:r>
           </a:p>
         </p:txBody>
@@ -20802,7 +20802,7 @@
                 <a:latin typeface="Times New Roman"/>
                 <a:ea typeface="宋体"/>
               </a:rPr>
-              <a:t>（1）诱发原因： </a:t>
+              <a:t>（1）诱发原因：</a:t>
             </a:r>
             <a:r>
               <a:rPr sz="1250" b="0">
@@ -20832,7 +20832,7 @@
                 <a:latin typeface="Times New Roman"/>
                 <a:ea typeface="宋体"/>
               </a:rPr>
-              <a:t>（2）几何表现： </a:t>
+              <a:t>（2）几何表现：</a:t>
             </a:r>
             <a:r>
               <a:rPr sz="1250" b="0">
@@ -20862,7 +20862,7 @@
                 <a:latin typeface="Times New Roman"/>
                 <a:ea typeface="宋体"/>
               </a:rPr>
-              <a:t>（3）典型实例： </a:t>
+              <a:t>（3）典型实例：</a:t>
             </a:r>
             <a:r>
               <a:rPr sz="1250" b="0">
@@ -20972,7 +20972,7 @@
                 <a:latin typeface="Times New Roman"/>
                 <a:ea typeface="宋体"/>
               </a:rPr>
-              <a:t>  2. 需求的变动（Change in Demand）</a:t>
+              <a:t>2. 需求的变动（Change in Demand）</a:t>
             </a:r>
           </a:p>
         </p:txBody>
@@ -21015,7 +21015,7 @@
                 <a:latin typeface="Times New Roman"/>
                 <a:ea typeface="宋体"/>
               </a:rPr>
-              <a:t>（1）诱发原因： </a:t>
+              <a:t>（1）诱发原因：</a:t>
             </a:r>
             <a:r>
               <a:rPr sz="1250" b="0">
@@ -21045,7 +21045,7 @@
                 <a:latin typeface="Times New Roman"/>
                 <a:ea typeface="宋体"/>
               </a:rPr>
-              <a:t>（2）几何表现： </a:t>
+              <a:t>（2）几何表现：</a:t>
             </a:r>
             <a:r>
               <a:rPr sz="1250" b="0">
@@ -21075,7 +21075,7 @@
                 <a:latin typeface="Times New Roman"/>
                 <a:ea typeface="宋体"/>
               </a:rPr>
-              <a:t>（3）典型实例： </a:t>
+              <a:t>（3）典型实例：</a:t>
             </a:r>
             <a:r>
               <a:rPr sz="1250" b="0">
@@ -21142,7 +21142,7 @@
                 <a:latin typeface="Times New Roman"/>
                 <a:ea typeface="宋体"/>
               </a:rPr>
-              <a:t>  ★ 核心要点：严禁混淆'点移动'与'线移动'，混淆二者是初学者和非专业管理者在市场营销研判中常犯的重大逻辑错误。</a:t>
+              <a:t>★ 核心要点：严禁混淆'点移动'与'线移动'，混淆二者是初学者和非专业管理者在市场营销研判中常犯的重大逻辑错误。</a:t>
             </a:r>
           </a:p>
         </p:txBody>
@@ -21549,7 +21549,7 @@
                 <a:latin typeface="Times New Roman"/>
                 <a:ea typeface="宋体"/>
               </a:rPr>
-              <a:t>  1. 超市生鲜晚间折价出清策略</a:t>
+              <a:t>1. 超市生鲜晚间折价出清策略</a:t>
             </a:r>
           </a:p>
         </p:txBody>
@@ -21592,7 +21592,7 @@
                 <a:latin typeface="Times New Roman"/>
                 <a:ea typeface="宋体"/>
               </a:rPr>
-              <a:t>（1）商业场景： </a:t>
+              <a:t>（1）商业场景：</a:t>
             </a:r>
             <a:r>
               <a:rPr sz="1250" b="0">
@@ -21622,7 +21622,7 @@
                 <a:latin typeface="Times New Roman"/>
                 <a:ea typeface="宋体"/>
               </a:rPr>
-              <a:t>（2）需求法则应用： </a:t>
+              <a:t>（2）需求法则应用：</a:t>
             </a:r>
             <a:r>
               <a:rPr sz="1250" b="0">
@@ -21652,7 +21652,7 @@
                 <a:latin typeface="Times New Roman"/>
                 <a:ea typeface="宋体"/>
               </a:rPr>
-              <a:t>（3）管理成果： </a:t>
+              <a:t>（3）管理成果：</a:t>
             </a:r>
             <a:r>
               <a:rPr sz="1250" b="0">
@@ -21762,7 +21762,7 @@
                 <a:latin typeface="Times New Roman"/>
                 <a:ea typeface="宋体"/>
               </a:rPr>
-              <a:t>  2. 品牌高端化与打破降价依赖</a:t>
+              <a:t>2. 品牌高端化与打破降价依赖</a:t>
             </a:r>
           </a:p>
         </p:txBody>
@@ -21805,7 +21805,7 @@
                 <a:latin typeface="Times New Roman"/>
                 <a:ea typeface="宋体"/>
               </a:rPr>
-              <a:t>（1）降价的局限性： </a:t>
+              <a:t>（1）降价的局限性：</a:t>
             </a:r>
             <a:r>
               <a:rPr sz="1250" b="0">
@@ -21835,7 +21835,7 @@
                 <a:latin typeface="Times New Roman"/>
                 <a:ea typeface="宋体"/>
               </a:rPr>
-              <a:t>（2）战略建议： </a:t>
+              <a:t>（2）战略建议：</a:t>
             </a:r>
             <a:r>
               <a:rPr sz="1250" b="0">
@@ -21902,7 +21902,7 @@
                 <a:latin typeface="Times New Roman"/>
                 <a:ea typeface="宋体"/>
               </a:rPr>
-              <a:t>  ★ 核心要点：短期促销靠价格杠杆刺激需求量，长期增长靠产品力拉动整条需求曲线右移。</a:t>
+              <a:t>★ 核心要点：短期促销靠价格杠杆刺激需求量，长期增长靠产品力拉动整条需求曲线右移。</a:t>
             </a:r>
           </a:p>
         </p:txBody>
